--- a/src/Tests/Samples.VerifyPowerPointStream.verified.pptx
+++ b/src/Tests/Samples.VerifyPowerPointStream.verified.pptx
@@ -522,7 +522,7 @@
           </a:lstStyle>
           <a:p>
             <a:pPr/>
-            <a:fld id="{77D45E74-418F-4FE2-8238-23C006C818F5}" type="slidenum">
+            <a:fld id="{00000001-0000-0000-0000-000000000000}" type="slidenum">
               <a:rPr altLang="en-US" lang="en-US" dirty="0"/>
               <a:t>‹#›</a:t>
             </a:fld>
@@ -728,7 +728,7 @@
           <a:lstStyle/>
           <a:p>
             <a:pPr/>
-            <a:fld id="{ED209DE0-E5C1-44D8-9BF0-9DA0706D5D5A}" type="slidenum">
+            <a:fld id="{00000001-0000-0000-0000-000000000000}" type="slidenum">
               <a:rPr altLang="en-US" lang="en-US" dirty="0"/>
               <a:t>1</a:t>
             </a:fld>
@@ -858,7 +858,7 @@
           <a:lstStyle/>
           <a:p>
             <a:pPr/>
-            <a:fld id="{D3180D40-A7F3-46EA-9D95-08FD84A953D8}" type="slidenum">
+            <a:fld id="{00000001-0000-0000-0000-000000000000}" type="slidenum">
               <a:rPr altLang="en-US" lang="en-US" dirty="0"/>
               <a:t>2</a:t>
             </a:fld>
@@ -988,7 +988,7 @@
           <a:lstStyle/>
           <a:p>
             <a:pPr/>
-            <a:fld id="{7C25B1CD-B6D6-4478-8D13-63254DE94956}" type="slidenum">
+            <a:fld id="{00000001-0000-0000-0000-000000000000}" type="slidenum">
               <a:rPr altLang="en-US" lang="en-US" dirty="0"/>
               <a:t>3</a:t>
             </a:fld>
@@ -1274,7 +1274,7 @@
           </a:lstStyle>
           <a:p>
             <a:pPr/>
-            <a:fld id="{3DEA7D2A-4504-413F-BFD8-59CEE923DA6D}" type="slidenum">
+            <a:fld id="{00000001-0000-0000-0000-000000000000}" type="slidenum">
               <a:rPr altLang="en-US" lang="en-US" dirty="0"/>
               <a:t>‹#›</a:t>
             </a:fld>
@@ -1470,7 +1470,7 @@
           </a:lstStyle>
           <a:p>
             <a:pPr/>
-            <a:fld id="{217C83D5-73AA-4F31-BF24-8AFEC62F5A85}" type="slidenum">
+            <a:fld id="{00000001-0000-0000-0000-000000000000}" type="slidenum">
               <a:rPr altLang="en-US" lang="en-US" dirty="0"/>
               <a:t>‹#›</a:t>
             </a:fld>
@@ -1674,7 +1674,7 @@
           </a:lstStyle>
           <a:p>
             <a:pPr/>
-            <a:fld id="{6F50A054-06FE-432B-9E96-162FDB29952A}" type="slidenum">
+            <a:fld id="{00000001-0000-0000-0000-000000000000}" type="slidenum">
               <a:rPr altLang="en-US" lang="en-US" dirty="0"/>
               <a:t>‹#›</a:t>
             </a:fld>
@@ -1891,7 +1891,7 @@
           </a:lstStyle>
           <a:p>
             <a:pPr/>
-            <a:fld id="{96FE76DF-DCFA-4D62-8523-79356EAEAD28}" type="slidenum">
+            <a:fld id="{00000001-0000-0000-0000-000000000000}" type="slidenum">
               <a:rPr altLang="en-US" lang="en-US" dirty="0"/>
               <a:t>‹#›</a:t>
             </a:fld>
@@ -2087,7 +2087,7 @@
           </a:lstStyle>
           <a:p>
             <a:pPr/>
-            <a:fld id="{80258B11-B43E-4E8C-9763-5FBF250EFDBF}" type="slidenum">
+            <a:fld id="{00000001-0000-0000-0000-000000000000}" type="slidenum">
               <a:rPr altLang="en-US" lang="en-US" dirty="0"/>
               <a:t>‹#›</a:t>
             </a:fld>
@@ -2303,7 +2303,7 @@
           </a:lstStyle>
           <a:p>
             <a:pPr/>
-            <a:fld id="{1780664F-CF03-49C8-97A7-ED1C403327FB}" type="slidenum">
+            <a:fld id="{00000001-0000-0000-0000-000000000000}" type="slidenum">
               <a:rPr altLang="en-US" lang="en-US" dirty="0"/>
               <a:t>‹#›</a:t>
             </a:fld>
@@ -2564,7 +2564,7 @@
           </a:lstStyle>
           <a:p>
             <a:pPr/>
-            <a:fld id="{5B5E922C-190A-4095-A6E2-E8B33F0CCB23}" type="slidenum">
+            <a:fld id="{00000001-0000-0000-0000-000000000000}" type="slidenum">
               <a:rPr altLang="en-US" lang="en-US" dirty="0"/>
               <a:t>‹#›</a:t>
             </a:fld>
@@ -2967,7 +2967,7 @@
           </a:lstStyle>
           <a:p>
             <a:pPr/>
-            <a:fld id="{31186DF0-70D4-4B94-957B-28E207C42208}" type="slidenum">
+            <a:fld id="{00000001-0000-0000-0000-000000000000}" type="slidenum">
               <a:rPr altLang="en-US" lang="en-US" dirty="0"/>
               <a:t>‹#›</a:t>
             </a:fld>
@@ -3106,7 +3106,7 @@
           </a:lstStyle>
           <a:p>
             <a:pPr/>
-            <a:fld id="{6F5449CA-9FAC-49CF-BA0C-F12547F49C90}" type="slidenum">
+            <a:fld id="{00000001-0000-0000-0000-000000000000}" type="slidenum">
               <a:rPr altLang="en-US" lang="en-US" dirty="0"/>
               <a:t>‹#›</a:t>
             </a:fld>
@@ -3216,7 +3216,7 @@
           </a:lstStyle>
           <a:p>
             <a:pPr/>
-            <a:fld id="{7E5981D2-AC2E-4B05-B988-1E5A5DCD2D82}" type="slidenum">
+            <a:fld id="{00000001-0000-0000-0000-000000000000}" type="slidenum">
               <a:rPr altLang="en-US" lang="en-US" dirty="0"/>
               <a:t>‹#›</a:t>
             </a:fld>
@@ -3521,7 +3521,7 @@
           </a:lstStyle>
           <a:p>
             <a:pPr/>
-            <a:fld id="{EC5EB3EC-804F-470F-9762-7AACFD4950D7}" type="slidenum">
+            <a:fld id="{00000001-0000-0000-0000-000000000000}" type="slidenum">
               <a:rPr altLang="en-US" lang="en-US" dirty="0"/>
               <a:t>‹#›</a:t>
             </a:fld>
@@ -3717,7 +3717,7 @@
           </a:lstStyle>
           <a:p>
             <a:pPr/>
-            <a:fld id="{F1E9BB08-6AAD-4D84-BBA5-270EB43AF3FD}" type="slidenum">
+            <a:fld id="{00000001-0000-0000-0000-000000000000}" type="slidenum">
               <a:rPr altLang="en-US" lang="en-US" dirty="0"/>
               <a:t>‹#›</a:t>
             </a:fld>
@@ -3999,7 +3999,7 @@
           </a:lstStyle>
           <a:p>
             <a:pPr/>
-            <a:fld id="{E3C08AC0-DBB3-4721-A386-B66CE9AE6D55}" type="slidenum">
+            <a:fld id="{00000001-0000-0000-0000-000000000000}" type="slidenum">
               <a:rPr altLang="en-US" lang="en-US" dirty="0"/>
               <a:t>‹#›</a:t>
             </a:fld>
@@ -4195,7 +4195,7 @@
           </a:lstStyle>
           <a:p>
             <a:pPr/>
-            <a:fld id="{559532C2-DAE3-4730-9795-DAE3C7C125A6}" type="slidenum">
+            <a:fld id="{00000001-0000-0000-0000-000000000000}" type="slidenum">
               <a:rPr altLang="en-US" lang="en-US" dirty="0"/>
               <a:t>‹#›</a:t>
             </a:fld>
@@ -4399,7 +4399,7 @@
           </a:lstStyle>
           <a:p>
             <a:pPr/>
-            <a:fld id="{3C595242-84C3-4B7D-8705-9DC35E776080}" type="slidenum">
+            <a:fld id="{00000001-0000-0000-0000-000000000000}" type="slidenum">
               <a:rPr altLang="en-US" lang="en-US" dirty="0"/>
               <a:t>‹#›</a:t>
             </a:fld>
@@ -4554,7 +4554,7 @@
           </a:lstStyle>
           <a:p>
             <a:pPr/>
-            <a:fld id="{EBC9A6D1-EF53-49A3-8028-3C6197DA8AE9}" type="slidenum">
+            <a:fld id="{00000001-0000-0000-0000-000000000000}" type="slidenum">
               <a:rPr altLang="en-US" lang="en-US" dirty="0"/>
               <a:t>‹#›</a:t>
             </a:fld>
@@ -4770,7 +4770,7 @@
           </a:lstStyle>
           <a:p>
             <a:pPr/>
-            <a:fld id="{2D0DE394-EFC4-4853-A286-0B0E7458D2A1}" type="slidenum">
+            <a:fld id="{00000001-0000-0000-0000-000000000000}" type="slidenum">
               <a:rPr altLang="en-US" lang="en-US" dirty="0"/>
               <a:t>‹#›</a:t>
             </a:fld>
@@ -5031,7 +5031,7 @@
           </a:lstStyle>
           <a:p>
             <a:pPr/>
-            <a:fld id="{E51B427F-D222-446F-8359-C1E9E77F8E4D}" type="slidenum">
+            <a:fld id="{00000001-0000-0000-0000-000000000000}" type="slidenum">
               <a:rPr altLang="en-US" lang="en-US" dirty="0"/>
               <a:t>‹#›</a:t>
             </a:fld>
@@ -5434,7 +5434,7 @@
           </a:lstStyle>
           <a:p>
             <a:pPr/>
-            <a:fld id="{3565C0A3-F648-422C-8E80-24D0C51AA28F}" type="slidenum">
+            <a:fld id="{00000001-0000-0000-0000-000000000000}" type="slidenum">
               <a:rPr altLang="en-US" lang="en-US" dirty="0"/>
               <a:t>‹#›</a:t>
             </a:fld>
@@ -5573,7 +5573,7 @@
           </a:lstStyle>
           <a:p>
             <a:pPr/>
-            <a:fld id="{A34AAF13-2538-4197-9A74-84D4481440DB}" type="slidenum">
+            <a:fld id="{00000001-0000-0000-0000-000000000000}" type="slidenum">
               <a:rPr altLang="en-US" lang="en-US" dirty="0"/>
               <a:t>‹#›</a:t>
             </a:fld>
@@ -5683,7 +5683,7 @@
           </a:lstStyle>
           <a:p>
             <a:pPr/>
-            <a:fld id="{66DF68A2-2AA1-4469-BD06-8546AA61ABC1}" type="slidenum">
+            <a:fld id="{00000001-0000-0000-0000-000000000000}" type="slidenum">
               <a:rPr altLang="en-US" lang="en-US" dirty="0"/>
               <a:t>‹#›</a:t>
             </a:fld>
@@ -5988,7 +5988,7 @@
           </a:lstStyle>
           <a:p>
             <a:pPr/>
-            <a:fld id="{E4C27293-2F22-4378-98B1-6A19C8FB085D}" type="slidenum">
+            <a:fld id="{00000001-0000-0000-0000-000000000000}" type="slidenum">
               <a:rPr altLang="en-US" lang="en-US" dirty="0"/>
               <a:t>‹#›</a:t>
             </a:fld>
@@ -6270,7 +6270,7 @@
           </a:lstStyle>
           <a:p>
             <a:pPr/>
-            <a:fld id="{2AA9B043-0E6A-402B-9E15-6AD8041BB753}" type="slidenum">
+            <a:fld id="{00000001-0000-0000-0000-000000000000}" type="slidenum">
               <a:rPr altLang="en-US" lang="en-US" dirty="0"/>
               <a:t>‹#›</a:t>
             </a:fld>
@@ -6610,7 +6610,7 @@
           </a:lstStyle>
           <a:p>
             <a:pPr/>
-            <a:fld id="{1EA33906-C89A-4086-968F-B0D6DAF1DF72}" type="slidenum">
+            <a:fld id="{00000001-0000-0000-0000-000000000000}" type="slidenum">
               <a:rPr altLang="en-US" lang="en-US" dirty="0"/>
               <a:t>‹#›</a:t>
             </a:fld>
@@ -7496,7 +7496,7 @@
           </a:lstStyle>
           <a:p>
             <a:pPr/>
-            <a:fld id="{340FA9FE-4DFB-495A-AF32-1B8DD53578E8}" type="slidenum">
+            <a:fld id="{00000001-0000-0000-0000-000000000000}" type="slidenum">
               <a:rPr altLang="en-US" lang="en-US" dirty="0"/>
               <a:t>‹#›</a:t>
             </a:fld>
